--- a/docs/aula-mvc.pptx
+++ b/docs/aula-mvc.pptx
@@ -1313,7 +1313,7 @@
           <a:p>
             <a:r>
               <a:rPr lang="en-US" dirty="0"/>
-              <a:t>Hoje vocês desenvolveram uma funcionalidade inteira em MVC. Com essa receita vocês conseguem criar editar, buscar, qualquer coisa — sempre camada por camada.</a:t>
+              <a:t>Hoje vocês desenvolveram uma funcionalidade inteira em MVC. Com essa receita vocês conseguem criar editar, buscar, qualquer coisa — sempre camada por camada. Fica o desafio: desenvolver o Editar nota seguindo a mesma receita.</a:t>
             </a:r>
             <a:endParaRPr lang="en-US" dirty="0"/>
           </a:p>
@@ -6831,6 +6831,81 @@
           </a:p>
         </p:txBody>
       </p:sp>
+      <p:sp>
+        <p:nvSpPr>
+          <p:cNvPr id="11" name="Shape 9"/>
+          <p:cNvSpPr/>
+          <p:nvPr/>
+        </p:nvSpPr>
+        <p:spPr>
+          <a:xfrm>
+            <a:off x="457200" y="3657600"/>
+            <a:ext cx="8229600" cy="914400"/>
+          </a:xfrm>
+          <a:prstGeom prst="roundRect">
+            <a:avLst>
+              <a:gd name="adj" fmla="val 8000"/>
+            </a:avLst>
+          </a:prstGeom>
+          <a:solidFill>
+            <a:srgbClr val="F1F3F6"/>
+          </a:solidFill>
+          <a:ln/>
+        </p:spPr>
+      </p:sp>
+      <p:sp>
+        <p:nvSpPr>
+          <p:cNvPr id="12" name="Text 10"/>
+          <p:cNvSpPr txBox="1"/>
+          <p:nvPr/>
+        </p:nvSpPr>
+        <p:spPr>
+          <a:xfrm>
+            <a:off x="731520" y="3657600"/>
+            <a:ext cx="7680960" cy="914400"/>
+          </a:xfrm>
+          <a:prstGeom prst="rect">
+            <a:avLst/>
+          </a:prstGeom>
+          <a:noFill/>
+          <a:ln/>
+        </p:spPr>
+        <p:txBody>
+          <a:bodyPr wrap="square" lIns="0" tIns="0" rIns="0" bIns="0" rtlCol="0" anchor="ctr"/>
+          <a:lstStyle/>
+          <a:p>
+            <a:pPr indent="0" marL="0">
+              <a:buNone/>
+            </a:pPr>
+            <a:r>
+              <a:rPr lang="en-US" sz="1600" b="1" dirty="0">
+                <a:solidFill>
+                  <a:srgbClr val="C8553D"/>
+                </a:solidFill>
+                <a:latin typeface="Arial" pitchFamily="34" charset="0"/>
+                <a:ea typeface="Arial" pitchFamily="34" charset="-122"/>
+                <a:cs typeface="Arial" pitchFamily="34" charset="-120"/>
+              </a:rPr>
+              <a:t>Desafio para casa: </a:t>
+            </a:r>
+            <a:pPr indent="0" marL="0">
+              <a:buNone/>
+            </a:pPr>
+            <a:r>
+              <a:rPr lang="en-US" sz="1600" dirty="0">
+                <a:solidFill>
+                  <a:srgbClr val="1F2430"/>
+                </a:solidFill>
+                <a:latin typeface="Arial" pitchFamily="34" charset="0"/>
+                <a:ea typeface="Arial" pitchFamily="34" charset="-122"/>
+                <a:cs typeface="Arial" pitchFamily="34" charset="-120"/>
+              </a:rPr>
+              <a:t>desenvolva a função "Editar nota" seguindo a mesma receita — Model → Controller → Rota → View → Testar.</a:t>
+            </a:r>
+            <a:endParaRPr lang="en-US" sz="1600" dirty="0"/>
+          </a:p>
+        </p:txBody>
+      </p:sp>
     </p:spTree>
   </p:cSld>
   <p:clrMapOvr>

--- a/docs/aula-mvc.pptx
+++ b/docs/aula-mvc.pptx
@@ -784,7 +784,7 @@
           <a:p>
             <a:r>
               <a:rPr lang="en-US" dirty="0"/>
-              <a:t>Pergunta: onde fica o comando que apaga do banco? No Model! Reparem que ele não sabe nada de botão ou tela. O $1 protege contra SQL Injection.</a:t>
+              <a:t>Em qual camada fica o comando que apaga do banco? No Model! Primeiro ele valida a regra — o id precisa ser um número — e depois apaga. Reparem que ele não sabe nada de botão ou tela. O $1 protege contra SQL Injection.</a:t>
             </a:r>
             <a:endParaRPr lang="en-US" dirty="0"/>
           </a:p>
@@ -872,7 +872,7 @@
           <a:p>
             <a:r>
               <a:rPr lang="en-US" dirty="0"/>
-              <a:t>O Controller pega o id que veio na URL, pede ao Model para remover e responde 204 — 'deu certo, sem conteúdo'. Ele orquestra, não acessa o banco diretamente.</a:t>
+              <a:t>O Controller pega o id que veio na URL, pede ao Model para remover e responde 204 — 'deu certo, sem conteúdo'. Se o Model recusar, por exemplo com um id inválido, o catch devolve 400 com a mensagem de erro, e o servidor continua de pé. Ele orquestra, não acessa o banco diretamente.</a:t>
             </a:r>
             <a:endParaRPr lang="en-US" dirty="0"/>
           </a:p>
@@ -4418,6 +4418,63 @@
                 <a:ea typeface="Courier New" pitchFamily="34" charset="-122"/>
                 <a:cs typeface="Courier New" pitchFamily="34" charset="-120"/>
               </a:rPr>
+              <a:t>  if (!Number.isInteger(Number(id))) {</a:t>
+            </a:r>
+            <a:endParaRPr lang="en-US" sz="1500" dirty="0"/>
+          </a:p>
+          <a:p>
+            <a:pPr indent="0" marL="0">
+              <a:buNone/>
+            </a:pPr>
+            <a:r>
+              <a:rPr lang="en-US" sz="1500" dirty="0">
+                <a:solidFill>
+                  <a:srgbClr val="E8E8E8"/>
+                </a:solidFill>
+                <a:latin typeface="Courier New" pitchFamily="34" charset="0"/>
+                <a:ea typeface="Courier New" pitchFamily="34" charset="-122"/>
+                <a:cs typeface="Courier New" pitchFamily="34" charset="-120"/>
+              </a:rPr>
+              <a:t>    throw new Error("Id inválido");</a:t>
+            </a:r>
+            <a:endParaRPr lang="en-US" sz="1500" dirty="0"/>
+          </a:p>
+          <a:p>
+            <a:pPr indent="0" marL="0">
+              <a:buNone/>
+            </a:pPr>
+            <a:r>
+              <a:rPr lang="en-US" sz="1500" dirty="0">
+                <a:solidFill>
+                  <a:srgbClr val="E8E8E8"/>
+                </a:solidFill>
+                <a:latin typeface="Courier New" pitchFamily="34" charset="0"/>
+                <a:ea typeface="Courier New" pitchFamily="34" charset="-122"/>
+                <a:cs typeface="Courier New" pitchFamily="34" charset="-120"/>
+              </a:rPr>
+              <a:t>  }</a:t>
+            </a:r>
+            <a:endParaRPr lang="en-US" sz="1500" dirty="0"/>
+          </a:p>
+          <a:p>
+            <a:pPr indent="0" marL="0">
+              <a:buNone/>
+            </a:pPr>
+            <a:endParaRPr lang="en-US" sz="1500" dirty="0"/>
+          </a:p>
+          <a:p>
+            <a:pPr indent="0" marL="0">
+              <a:buNone/>
+            </a:pPr>
+            <a:r>
+              <a:rPr lang="en-US" sz="1500" dirty="0">
+                <a:solidFill>
+                  <a:srgbClr val="E8E8E8"/>
+                </a:solidFill>
+                <a:latin typeface="Courier New" pitchFamily="34" charset="0"/>
+                <a:ea typeface="Courier New" pitchFamily="34" charset="-122"/>
+                <a:cs typeface="Courier New" pitchFamily="34" charset="-120"/>
+              </a:rPr>
               <a:t>  await pool.query(</a:t>
             </a:r>
             <a:endParaRPr lang="en-US" sz="1500" dirty="0"/>
@@ -4547,7 +4604,7 @@
                 <a:ea typeface="Arial" pitchFamily="34" charset="-122"/>
                 <a:cs typeface="Arial" pitchFamily="34" charset="-120"/>
               </a:rPr>
-              <a:t>Onde fica o comando que apaga do banco?</a:t>
+              <a:t>Regra: o id precisa ser um número.</a:t>
             </a:r>
             <a:endParaRPr lang="en-US" sz="1500" dirty="0"/>
           </a:p>
@@ -4570,7 +4627,7 @@
                 <a:ea typeface="Arial" pitchFamily="34" charset="-122"/>
                 <a:cs typeface="Arial" pitchFamily="34" charset="-120"/>
               </a:rPr>
-              <a:t>No Model.</a:t>
+              <a:t>Depois, apaga do banco.</a:t>
             </a:r>
             <a:endParaRPr lang="en-US" sz="1500" dirty="0"/>
           </a:p>
@@ -4593,7 +4650,7 @@
                 <a:ea typeface="Arial" pitchFamily="34" charset="-122"/>
                 <a:cs typeface="Arial" pitchFamily="34" charset="-120"/>
               </a:rPr>
-              <a:t>Ele não sabe nada de botão ou tela.</a:t>
+              <a:t>Não sabe nada de botão ou tela.</a:t>
             </a:r>
             <a:endParaRPr lang="en-US" sz="1500" dirty="0"/>
           </a:p>
@@ -4803,7 +4860,7 @@
                 <a:ea typeface="Courier New" pitchFamily="34" charset="-122"/>
                 <a:cs typeface="Courier New" pitchFamily="34" charset="-120"/>
               </a:rPr>
-              <a:t>  await Nota.remover(requisicao.params.id);</a:t>
+              <a:t>  try {</a:t>
             </a:r>
             <a:endParaRPr lang="en-US" sz="1500" dirty="0"/>
           </a:p>
@@ -4820,7 +4877,92 @@
                 <a:ea typeface="Courier New" pitchFamily="34" charset="-122"/>
                 <a:cs typeface="Courier New" pitchFamily="34" charset="-120"/>
               </a:rPr>
-              <a:t>  resposta.status(204).send();</a:t>
+              <a:t>    await Nota.remover(requisicao.params.id);</a:t>
+            </a:r>
+            <a:endParaRPr lang="en-US" sz="1500" dirty="0"/>
+          </a:p>
+          <a:p>
+            <a:pPr indent="0" marL="0">
+              <a:buNone/>
+            </a:pPr>
+            <a:r>
+              <a:rPr lang="en-US" sz="1500" dirty="0">
+                <a:solidFill>
+                  <a:srgbClr val="E8E8E8"/>
+                </a:solidFill>
+                <a:latin typeface="Courier New" pitchFamily="34" charset="0"/>
+                <a:ea typeface="Courier New" pitchFamily="34" charset="-122"/>
+                <a:cs typeface="Courier New" pitchFamily="34" charset="-120"/>
+              </a:rPr>
+              <a:t>    resposta.status(204).send();</a:t>
+            </a:r>
+            <a:endParaRPr lang="en-US" sz="1500" dirty="0"/>
+          </a:p>
+          <a:p>
+            <a:pPr indent="0" marL="0">
+              <a:buNone/>
+            </a:pPr>
+            <a:r>
+              <a:rPr lang="en-US" sz="1500" dirty="0">
+                <a:solidFill>
+                  <a:srgbClr val="E8E8E8"/>
+                </a:solidFill>
+                <a:latin typeface="Courier New" pitchFamily="34" charset="0"/>
+                <a:ea typeface="Courier New" pitchFamily="34" charset="-122"/>
+                <a:cs typeface="Courier New" pitchFamily="34" charset="-120"/>
+              </a:rPr>
+              <a:t>  } catch (erro) {</a:t>
+            </a:r>
+            <a:endParaRPr lang="en-US" sz="1500" dirty="0"/>
+          </a:p>
+          <a:p>
+            <a:pPr indent="0" marL="0">
+              <a:buNone/>
+            </a:pPr>
+            <a:r>
+              <a:rPr lang="en-US" sz="1500" dirty="0">
+                <a:solidFill>
+                  <a:srgbClr val="E8E8E8"/>
+                </a:solidFill>
+                <a:latin typeface="Courier New" pitchFamily="34" charset="0"/>
+                <a:ea typeface="Courier New" pitchFamily="34" charset="-122"/>
+                <a:cs typeface="Courier New" pitchFamily="34" charset="-120"/>
+              </a:rPr>
+              <a:t>    resposta.status(400)</a:t>
+            </a:r>
+            <a:endParaRPr lang="en-US" sz="1500" dirty="0"/>
+          </a:p>
+          <a:p>
+            <a:pPr indent="0" marL="0">
+              <a:buNone/>
+            </a:pPr>
+            <a:r>
+              <a:rPr lang="en-US" sz="1500" dirty="0">
+                <a:solidFill>
+                  <a:srgbClr val="E8E8E8"/>
+                </a:solidFill>
+                <a:latin typeface="Courier New" pitchFamily="34" charset="0"/>
+                <a:ea typeface="Courier New" pitchFamily="34" charset="-122"/>
+                <a:cs typeface="Courier New" pitchFamily="34" charset="-120"/>
+              </a:rPr>
+              <a:t>      .json({ erro: erro.message });</a:t>
+            </a:r>
+            <a:endParaRPr lang="en-US" sz="1500" dirty="0"/>
+          </a:p>
+          <a:p>
+            <a:pPr indent="0" marL="0">
+              <a:buNone/>
+            </a:pPr>
+            <a:r>
+              <a:rPr lang="en-US" sz="1500" dirty="0">
+                <a:solidFill>
+                  <a:srgbClr val="E8E8E8"/>
+                </a:solidFill>
+                <a:latin typeface="Courier New" pitchFamily="34" charset="0"/>
+                <a:ea typeface="Courier New" pitchFamily="34" charset="-122"/>
+                <a:cs typeface="Courier New" pitchFamily="34" charset="-120"/>
+              </a:rPr>
+              <a:t>  }</a:t>
             </a:r>
             <a:endParaRPr lang="en-US" sz="1500" dirty="0"/>
           </a:p>
@@ -4921,14 +5063,8 @@
                 <a:ea typeface="Arial" pitchFamily="34" charset="-122"/>
                 <a:cs typeface="Arial" pitchFamily="34" charset="-120"/>
               </a:rPr>
-              <a:t>204 = deu certo, sem conteúdo.</a:t>
-            </a:r>
-            <a:endParaRPr lang="en-US" sz="1500" dirty="0"/>
-          </a:p>
-          <a:p>
-            <a:pPr indent="0" marL="0">
-              <a:buNone/>
-            </a:pPr>
+              <a:t>204 = deu certo.</a:t>
+            </a:r>
             <a:endParaRPr lang="en-US" sz="1500" dirty="0"/>
           </a:p>
           <a:p>
@@ -4944,7 +5080,30 @@
                 <a:ea typeface="Arial" pitchFamily="34" charset="-122"/>
                 <a:cs typeface="Arial" pitchFamily="34" charset="-120"/>
               </a:rPr>
-              <a:t>Orquestra, não acessa o banco.</a:t>
+              <a:t>400 = erro tratado, o servidor não cai.</a:t>
+            </a:r>
+            <a:endParaRPr lang="en-US" sz="1500" dirty="0"/>
+          </a:p>
+          <a:p>
+            <a:pPr indent="0" marL="0">
+              <a:buNone/>
+            </a:pPr>
+            <a:endParaRPr lang="en-US" sz="1500" dirty="0"/>
+          </a:p>
+          <a:p>
+            <a:pPr indent="0" marL="0">
+              <a:buNone/>
+            </a:pPr>
+            <a:r>
+              <a:rPr lang="en-US" sz="1500" dirty="0">
+                <a:solidFill>
+                  <a:srgbClr val="1F2430"/>
+                </a:solidFill>
+                <a:latin typeface="Arial" pitchFamily="34" charset="0"/>
+                <a:ea typeface="Arial" pitchFamily="34" charset="-122"/>
+                <a:cs typeface="Arial" pitchFamily="34" charset="-120"/>
+              </a:rPr>
+              <a:t>Não acessa o banco.</a:t>
             </a:r>
             <a:endParaRPr lang="en-US" sz="1500" dirty="0"/>
           </a:p>

--- a/docs/aula-mvc.pptx
+++ b/docs/aula-mvc.pptx
@@ -1490,7 +1490,7 @@
             <a:r>
               <a:rPr lang="en-US" dirty="0"/>
               <a:t>Mostrar ao vivo: app-sem-mvc/server.js.
-Olhem esse arquivo, um monólito: o HTML, a validação e os dados estão todos juntos na mesma rota. Funciona? Funciona. Mas se eu precisar mudar só o visual, vou mexer no mesmo lugar onde está a regra. Isso é risco. Reparem nas cores: vermelho recebe o pedido, verde é regra e dado, amarelo é tela. As três responsabilidades já estão aí, só que embaralhadas. Pergunta pra vocês: como organizariam esse código?</a:t>
+Olhem essa rota do monólito: na mesma função está a consulta ao banco, a regra de negócio — favoritas primeiro — e o HTML da tela. Funciona? Funciona. Mas se eu precisar mudar só o visual, vou mexer no mesmo lugar onde está a regra. Isso é risco. Reparem nas cores: vermelho recebe o pedido, verde é dado e regra, amarelo é tela. As três responsabilidades já estão aí, só que embaralhadas. Pergunta pra vocês: como organizariam esse código?</a:t>
             </a:r>
             <a:endParaRPr lang="en-US" dirty="0"/>
           </a:p>
@@ -7580,7 +7580,7 @@
               <a:buNone/>
             </a:pPr>
             <a:r>
-              <a:rPr lang="en-US" sz="1300" dirty="0">
+              <a:rPr lang="en-US" sz="1200" dirty="0">
                 <a:solidFill>
                   <a:srgbClr val="8B93A5"/>
                 </a:solidFill>
@@ -7590,48 +7590,48 @@
               </a:rPr>
               <a:t>// app-sem-mvc/server.js</a:t>
             </a:r>
-            <a:endParaRPr lang="en-US" sz="1300" dirty="0"/>
-          </a:p>
-          <a:p>
-            <a:pPr indent="0" marL="0">
-              <a:buNone/>
-            </a:pPr>
-            <a:r>
-              <a:rPr lang="en-US" sz="1300" dirty="0">
-                <a:solidFill>
-                  <a:srgbClr val="E8E8E8"/>
+            <a:endParaRPr lang="en-US" sz="1200" dirty="0"/>
+          </a:p>
+          <a:p>
+            <a:pPr indent="0" marL="0">
+              <a:buNone/>
+            </a:pPr>
+            <a:r>
+              <a:rPr lang="en-US" sz="1200" dirty="0">
+                <a:solidFill>
+                  <a:srgbClr val="F29A85"/>
                 </a:solidFill>
                 <a:latin typeface="Courier New" pitchFamily="34" charset="0"/>
                 <a:ea typeface="Courier New" pitchFamily="34" charset="-122"/>
                 <a:cs typeface="Courier New" pitchFamily="34" charset="-120"/>
               </a:rPr>
-              <a:t>app.post("/notas", (req, res) =&gt; {</a:t>
-            </a:r>
-            <a:endParaRPr lang="en-US" sz="1300" dirty="0"/>
-          </a:p>
-          <a:p>
-            <a:pPr indent="0" marL="0">
-              <a:buNone/>
-            </a:pPr>
-            <a:r>
-              <a:rPr lang="en-US" sz="1300" dirty="0">
-                <a:solidFill>
-                  <a:srgbClr val="F29A85"/>
+              <a:t>app.get("/", async (req, res) =&gt; {</a:t>
+            </a:r>
+            <a:endParaRPr lang="en-US" sz="1200" dirty="0"/>
+          </a:p>
+          <a:p>
+            <a:pPr indent="0" marL="0">
+              <a:buNone/>
+            </a:pPr>
+            <a:r>
+              <a:rPr lang="en-US" sz="1200" dirty="0">
+                <a:solidFill>
+                  <a:srgbClr val="6FD39A"/>
                 </a:solidFill>
                 <a:latin typeface="Courier New" pitchFamily="34" charset="0"/>
                 <a:ea typeface="Courier New" pitchFamily="34" charset="-122"/>
                 <a:cs typeface="Courier New" pitchFamily="34" charset="-120"/>
               </a:rPr>
-              <a:t>  const { titulo } = req.body;</a:t>
-            </a:r>
-            <a:endParaRPr lang="en-US" sz="1300" dirty="0"/>
-          </a:p>
-          <a:p>
-            <a:pPr indent="0" marL="0">
-              <a:buNone/>
-            </a:pPr>
-            <a:r>
-              <a:rPr lang="en-US" sz="1300" dirty="0">
+              <a:t>  const r = await pool.query(</a:t>
+            </a:r>
+            <a:endParaRPr lang="en-US" sz="1200" dirty="0"/>
+          </a:p>
+          <a:p>
+            <a:pPr indent="0" marL="0">
+              <a:buNone/>
+            </a:pPr>
+            <a:r>
+              <a:rPr lang="en-US" sz="1200" dirty="0">
                 <a:solidFill>
                   <a:srgbClr val="6FD39A"/>
                 </a:solidFill>
@@ -7639,16 +7639,16 @@
                 <a:ea typeface="Courier New" pitchFamily="34" charset="-122"/>
                 <a:cs typeface="Courier New" pitchFamily="34" charset="-120"/>
               </a:rPr>
-              <a:t>  if (!titulo)</a:t>
-            </a:r>
-            <a:endParaRPr lang="en-US" sz="1300" dirty="0"/>
-          </a:p>
-          <a:p>
-            <a:pPr indent="0" marL="0">
-              <a:buNone/>
-            </a:pPr>
-            <a:r>
-              <a:rPr lang="en-US" sz="1300" dirty="0">
+              <a:t>    "SELECT * FROM notas ORDER BY " +</a:t>
+            </a:r>
+            <a:endParaRPr lang="en-US" sz="1200" dirty="0"/>
+          </a:p>
+          <a:p>
+            <a:pPr indent="0" marL="0">
+              <a:buNone/>
+            </a:pPr>
+            <a:r>
+              <a:rPr lang="en-US" sz="1200" dirty="0">
                 <a:solidFill>
                   <a:srgbClr val="6FD39A"/>
                 </a:solidFill>
@@ -7656,33 +7656,33 @@
                 <a:ea typeface="Courier New" pitchFamily="34" charset="-122"/>
                 <a:cs typeface="Courier New" pitchFamily="34" charset="-120"/>
               </a:rPr>
-              <a:t>    return res.send("Erro");</a:t>
-            </a:r>
-            <a:endParaRPr lang="en-US" sz="1300" dirty="0"/>
-          </a:p>
-          <a:p>
-            <a:pPr indent="0" marL="0">
-              <a:buNone/>
-            </a:pPr>
-            <a:r>
-              <a:rPr lang="en-US" sz="1300" dirty="0">
-                <a:solidFill>
-                  <a:srgbClr val="6FD39A"/>
+              <a:t>    "favorita DESC, criado_em DESC");</a:t>
+            </a:r>
+            <a:endParaRPr lang="en-US" sz="1200" dirty="0"/>
+          </a:p>
+          <a:p>
+            <a:pPr indent="0" marL="0">
+              <a:buNone/>
+            </a:pPr>
+            <a:r>
+              <a:rPr lang="en-US" sz="1200" dirty="0">
+                <a:solidFill>
+                  <a:srgbClr val="F2B84B"/>
                 </a:solidFill>
                 <a:latin typeface="Courier New" pitchFamily="34" charset="0"/>
                 <a:ea typeface="Courier New" pitchFamily="34" charset="-122"/>
                 <a:cs typeface="Courier New" pitchFamily="34" charset="-120"/>
               </a:rPr>
-              <a:t>  notas.push({ titulo });</a:t>
-            </a:r>
-            <a:endParaRPr lang="en-US" sz="1300" dirty="0"/>
-          </a:p>
-          <a:p>
-            <a:pPr indent="0" marL="0">
-              <a:buNone/>
-            </a:pPr>
-            <a:r>
-              <a:rPr lang="en-US" sz="1300" dirty="0">
+              <a:t>  const html = r.rows.map((n) =&gt;</a:t>
+            </a:r>
+            <a:endParaRPr lang="en-US" sz="1200" dirty="0"/>
+          </a:p>
+          <a:p>
+            <a:pPr indent="0" marL="0">
+              <a:buNone/>
+            </a:pPr>
+            <a:r>
+              <a:rPr lang="en-US" sz="1200" dirty="0">
                 <a:solidFill>
                   <a:srgbClr val="F2B84B"/>
                 </a:solidFill>
@@ -7690,16 +7690,16 @@
                 <a:ea typeface="Courier New" pitchFamily="34" charset="-122"/>
                 <a:cs typeface="Courier New" pitchFamily="34" charset="-120"/>
               </a:rPr>
-              <a:t>  res.send(`&lt;html&gt;</a:t>
-            </a:r>
-            <a:endParaRPr lang="en-US" sz="1300" dirty="0"/>
-          </a:p>
-          <a:p>
-            <a:pPr indent="0" marL="0">
-              <a:buNone/>
-            </a:pPr>
-            <a:r>
-              <a:rPr lang="en-US" sz="1300" dirty="0">
+              <a:t>    `&lt;li&gt;${n.titulo}&lt;/li&gt;`).join("");</a:t>
+            </a:r>
+            <a:endParaRPr lang="en-US" sz="1200" dirty="0"/>
+          </a:p>
+          <a:p>
+            <a:pPr indent="0" marL="0">
+              <a:buNone/>
+            </a:pPr>
+            <a:r>
+              <a:rPr lang="en-US" sz="1200" dirty="0">
                 <a:solidFill>
                   <a:srgbClr val="F2B84B"/>
                 </a:solidFill>
@@ -7707,43 +7707,26 @@
                 <a:ea typeface="Courier New" pitchFamily="34" charset="-122"/>
                 <a:cs typeface="Courier New" pitchFamily="34" charset="-120"/>
               </a:rPr>
-              <a:t>    &lt;ul&gt;${linhas}&lt;/ul&gt;</a:t>
-            </a:r>
-            <a:endParaRPr lang="en-US" sz="1300" dirty="0"/>
-          </a:p>
-          <a:p>
-            <a:pPr indent="0" marL="0">
-              <a:buNone/>
-            </a:pPr>
-            <a:r>
-              <a:rPr lang="en-US" sz="1300" dirty="0">
-                <a:solidFill>
-                  <a:srgbClr val="F2B84B"/>
+              <a:t>  res.send(`&lt;ul&gt;${html}&lt;/ul&gt;`);</a:t>
+            </a:r>
+            <a:endParaRPr lang="en-US" sz="1200" dirty="0"/>
+          </a:p>
+          <a:p>
+            <a:pPr indent="0" marL="0">
+              <a:buNone/>
+            </a:pPr>
+            <a:r>
+              <a:rPr lang="en-US" sz="1200" dirty="0">
+                <a:solidFill>
+                  <a:srgbClr val="E8E8E8"/>
                 </a:solidFill>
                 <a:latin typeface="Courier New" pitchFamily="34" charset="0"/>
                 <a:ea typeface="Courier New" pitchFamily="34" charset="-122"/>
                 <a:cs typeface="Courier New" pitchFamily="34" charset="-120"/>
               </a:rPr>
-              <a:t>  &lt;/html&gt;`);</a:t>
-            </a:r>
-            <a:endParaRPr lang="en-US" sz="1300" dirty="0"/>
-          </a:p>
-          <a:p>
-            <a:pPr indent="0" marL="0">
-              <a:buNone/>
-            </a:pPr>
-            <a:r>
-              <a:rPr lang="en-US" sz="1300" dirty="0">
-                <a:solidFill>
-                  <a:srgbClr val="E8E8E8"/>
-                </a:solidFill>
-                <a:latin typeface="Courier New" pitchFamily="34" charset="0"/>
-                <a:ea typeface="Courier New" pitchFamily="34" charset="-122"/>
-                <a:cs typeface="Courier New" pitchFamily="34" charset="-120"/>
-              </a:rPr>
               <a:t>});</a:t>
             </a:r>
-            <a:endParaRPr lang="en-US" sz="1300" dirty="0"/>
+            <a:endParaRPr lang="en-US" sz="1200" dirty="0"/>
           </a:p>
         </p:txBody>
       </p:sp>

--- a/docs/aula-mvc.pptx
+++ b/docs/aula-mvc.pptx
@@ -1489,8 +1489,8 @@
           <a:p>
             <a:r>
               <a:rPr lang="en-US" dirty="0"/>
-              <a:t>Mostrar ao vivo: app-sem-mvc/server.js.
-Olhem essa rota do monólito: na mesma função está a consulta ao banco, a regra de negócio — favoritas primeiro — e o HTML da tela. Funciona? Funciona. Mas se eu precisar mudar só o visual, vou mexer no mesmo lugar onde está a regra. Isso é risco. Reparem nas cores: vermelho recebe o pedido, verde é dado e regra, amarelo é tela. As três responsabilidades já estão aí, só que embaralhadas. Pergunta pra vocês: como organizariam esse código?</a:t>
+              <a:t>Mostrar ao vivo: app-sem-mvc/server.js, rolando o arquivo inteiro.
+Olhem esse arquivo: é o mesmo sistema de notas, com as mesmas funções, mas tudo num arquivo só — 153 linhas. Na mesma rota está a conexão com o banco, o SQL, a regra de negócio — favoritas primeiro —, a validação e o HTML da tela, até o CSS. Funciona? Funciona. Mas se eu precisar mudar só o visual, vou mexer no mesmo lugar onde está a regra. Isso é risco. Reparem nas cores: vermelho recebe o pedido, verde é dado e regra, amarelo é tela. As três responsabilidades já estão aí, só que embaralhadas. Pergunta pra vocês: como organizariam esse código?</a:t>
             </a:r>
             <a:endParaRPr lang="en-US" dirty="0"/>
           </a:p>
@@ -7382,7 +7382,7 @@
         <p:spPr>
           <a:xfrm>
             <a:off x="457200" y="1097280"/>
-            <a:ext cx="4023360" cy="2194560"/>
+            <a:ext cx="2926080" cy="1737360"/>
           </a:xfrm>
           <a:prstGeom prst="rect">
             <a:avLst/>
@@ -7402,7 +7402,7 @@
               <a:buChar char="•"/>
             </a:pPr>
             <a:r>
-              <a:rPr lang="en-US" sz="1700" dirty="0">
+              <a:rPr lang="en-US" sz="1400" dirty="0">
                 <a:solidFill>
                   <a:srgbClr val="1F2430"/>
                 </a:solidFill>
@@ -7410,9 +7410,9 @@
                 <a:ea typeface="Arial" pitchFamily="34" charset="-122"/>
                 <a:cs typeface="Arial" pitchFamily="34" charset="-120"/>
               </a:rPr>
-              <a:t>Tela, regras e banco de dados no mesmo arquivo</a:t>
-            </a:r>
-            <a:endParaRPr lang="en-US" sz="1700" dirty="0"/>
+              <a:t>Tela, regras e banco no mesmo arquivo</a:t>
+            </a:r>
+            <a:endParaRPr lang="en-US" sz="1400" dirty="0"/>
           </a:p>
           <a:p>
             <a:pPr marL="342900" indent="-342900">
@@ -7423,7 +7423,7 @@
               <a:buChar char="•"/>
             </a:pPr>
             <a:r>
-              <a:rPr lang="en-US" sz="1700" dirty="0">
+              <a:rPr lang="en-US" sz="1400" dirty="0">
                 <a:solidFill>
                   <a:srgbClr val="1F2430"/>
                 </a:solidFill>
@@ -7431,9 +7431,9 @@
                 <a:ea typeface="Arial" pitchFamily="34" charset="-122"/>
                 <a:cs typeface="Arial" pitchFamily="34" charset="-120"/>
               </a:rPr>
-              <a:t>Mudar o visual pode quebrar a regra de negócio</a:t>
-            </a:r>
-            <a:endParaRPr lang="en-US" sz="1700" dirty="0"/>
+              <a:t>Mudar o visual pode quebrar a regra</a:t>
+            </a:r>
+            <a:endParaRPr lang="en-US" sz="1400" dirty="0"/>
           </a:p>
           <a:p>
             <a:pPr marL="342900" indent="-342900">
@@ -7444,7 +7444,7 @@
               <a:buChar char="•"/>
             </a:pPr>
             <a:r>
-              <a:rPr lang="en-US" sz="1700" dirty="0">
+              <a:rPr lang="en-US" sz="1400" dirty="0">
                 <a:solidFill>
                   <a:srgbClr val="1F2430"/>
                 </a:solidFill>
@@ -7454,7 +7454,7 @@
               </a:rPr>
               <a:t>Difícil de testar, manter e dividir na equipe</a:t>
             </a:r>
-            <a:endParaRPr lang="en-US" sz="1700" dirty="0"/>
+            <a:endParaRPr lang="en-US" sz="1400" dirty="0"/>
           </a:p>
         </p:txBody>
       </p:sp>
@@ -7466,12 +7466,90 @@
         </p:nvSpPr>
         <p:spPr>
           <a:xfrm>
-            <a:off x="457200" y="3383280"/>
-            <a:ext cx="4023360" cy="1188720"/>
+            <a:off x="457200" y="2743200"/>
+            <a:ext cx="2926080" cy="914400"/>
           </a:xfrm>
           <a:prstGeom prst="roundRect">
             <a:avLst>
-              <a:gd name="adj" fmla="val 6154"/>
+              <a:gd name="adj" fmla="val 8000"/>
+            </a:avLst>
+          </a:prstGeom>
+          <a:solidFill>
+            <a:srgbClr val="1F2430"/>
+          </a:solidFill>
+          <a:ln/>
+        </p:spPr>
+      </p:sp>
+      <p:sp>
+        <p:nvSpPr>
+          <p:cNvPr id="5" name="Text 3"/>
+          <p:cNvSpPr txBox="1"/>
+          <p:nvPr/>
+        </p:nvSpPr>
+        <p:spPr>
+          <a:xfrm>
+            <a:off x="457200" y="2743200"/>
+            <a:ext cx="2926080" cy="914400"/>
+          </a:xfrm>
+          <a:prstGeom prst="rect">
+            <a:avLst/>
+          </a:prstGeom>
+          <a:noFill/>
+          <a:ln/>
+        </p:spPr>
+        <p:txBody>
+          <a:bodyPr wrap="square" lIns="0" tIns="0" rIns="0" bIns="0" rtlCol="0" anchor="ctr"/>
+          <a:lstStyle/>
+          <a:p>
+            <a:pPr algn="ctr" indent="0" marL="0">
+              <a:buNone/>
+            </a:pPr>
+            <a:r>
+              <a:rPr lang="en-US" sz="1700" b="1" dirty="0">
+                <a:solidFill>
+                  <a:srgbClr val="FFFFFF"/>
+                </a:solidFill>
+                <a:latin typeface="Arial" pitchFamily="34" charset="0"/>
+                <a:ea typeface="Arial" pitchFamily="34" charset="-122"/>
+                <a:cs typeface="Arial" pitchFamily="34" charset="-120"/>
+              </a:rPr>
+              <a:t>1 arquivo · 153 linhas</a:t>
+            </a:r>
+            <a:endParaRPr lang="en-US" sz="1700" dirty="0"/>
+          </a:p>
+          <a:p>
+            <a:pPr algn="ctr" indent="0" marL="0">
+              <a:buNone/>
+            </a:pPr>
+            <a:r>
+              <a:rPr lang="en-US" sz="1100" dirty="0">
+                <a:solidFill>
+                  <a:srgbClr val="C9CED8"/>
+                </a:solidFill>
+                <a:latin typeface="Arial" pitchFamily="34" charset="0"/>
+                <a:ea typeface="Arial" pitchFamily="34" charset="-122"/>
+                <a:cs typeface="Arial" pitchFamily="34" charset="-120"/>
+              </a:rPr>
+              <a:t>4 rotas · 5 consultas SQL · HTML e CSS</a:t>
+            </a:r>
+            <a:endParaRPr lang="en-US" sz="1700" dirty="0"/>
+          </a:p>
+        </p:txBody>
+      </p:sp>
+      <p:sp>
+        <p:nvSpPr>
+          <p:cNvPr id="6" name="Shape 4"/>
+          <p:cNvSpPr/>
+          <p:nvPr/>
+        </p:nvSpPr>
+        <p:spPr>
+          <a:xfrm>
+            <a:off x="457200" y="3840480"/>
+            <a:ext cx="2926080" cy="1097280"/>
+          </a:xfrm>
+          <a:prstGeom prst="roundRect">
+            <a:avLst>
+              <a:gd name="adj" fmla="val 6667"/>
             </a:avLst>
           </a:prstGeom>
           <a:solidFill>
@@ -7482,14 +7560,14 @@
       </p:sp>
       <p:sp>
         <p:nvSpPr>
-          <p:cNvPr id="5" name="Text 3"/>
-          <p:cNvSpPr txBox="1"/>
-          <p:nvPr/>
-        </p:nvSpPr>
-        <p:spPr>
-          <a:xfrm>
-            <a:off x="640080" y="3474720"/>
-            <a:ext cx="3657600" cy="1005840"/>
+          <p:cNvPr id="7" name="Text 5"/>
+          <p:cNvSpPr txBox="1"/>
+          <p:nvPr/>
+        </p:nvSpPr>
+        <p:spPr>
+          <a:xfrm>
+            <a:off x="594360" y="3840480"/>
+            <a:ext cx="2651760" cy="1097280"/>
           </a:xfrm>
           <a:prstGeom prst="rect">
             <a:avLst/>
@@ -7505,7 +7583,7 @@
               <a:buNone/>
             </a:pPr>
             <a:r>
-              <a:rPr lang="en-US" sz="1500" b="1" dirty="0">
+              <a:rPr lang="en-US" sz="1300" b="1" dirty="0">
                 <a:solidFill>
                   <a:srgbClr val="1F2430"/>
                 </a:solidFill>
@@ -7519,7 +7597,7 @@
               <a:buNone/>
             </a:pPr>
             <a:r>
-              <a:rPr lang="en-US" sz="1500" dirty="0">
+              <a:rPr lang="en-US" sz="1300" dirty="0">
                 <a:solidFill>
                   <a:srgbClr val="1F2430"/>
                 </a:solidFill>
@@ -7529,24 +7607,91 @@
               </a:rPr>
               <a:t>organizar o app de anotações em MVC e criar a função "Excluir nota".</a:t>
             </a:r>
-            <a:endParaRPr lang="en-US" sz="1500" dirty="0"/>
-          </a:p>
-        </p:txBody>
-      </p:sp>
-      <p:sp>
-        <p:nvSpPr>
-          <p:cNvPr id="6" name="Shape 4"/>
+            <a:endParaRPr lang="en-US" sz="1300" dirty="0"/>
+          </a:p>
+        </p:txBody>
+      </p:sp>
+      <p:sp>
+        <p:nvSpPr>
+          <p:cNvPr id="8" name="Text 6"/>
+          <p:cNvSpPr txBox="1"/>
+          <p:nvPr/>
+        </p:nvSpPr>
+        <p:spPr>
+          <a:xfrm>
+            <a:off x="3611880" y="868680"/>
+            <a:ext cx="5074920" cy="274320"/>
+          </a:xfrm>
+          <a:prstGeom prst="rect">
+            <a:avLst/>
+          </a:prstGeom>
+          <a:noFill/>
+          <a:ln/>
+        </p:spPr>
+        <p:txBody>
+          <a:bodyPr wrap="square" lIns="0" tIns="0" rIns="0" bIns="0" rtlCol="0" anchor="ctr"/>
+          <a:lstStyle/>
+          <a:p>
+            <a:pPr algn="r" indent="0" marL="0">
+              <a:buNone/>
+            </a:pPr>
+            <a:r>
+              <a:rPr lang="en-US" sz="1200" b="1" dirty="0">
+                <a:solidFill>
+                  <a:srgbClr val="C8553D"/>
+                </a:solidFill>
+                <a:latin typeface="Arial" pitchFamily="34" charset="0"/>
+                <a:ea typeface="Arial" pitchFamily="34" charset="-122"/>
+                <a:cs typeface="Arial" pitchFamily="34" charset="-120"/>
+              </a:rPr>
+              <a:t>■ Controller  </a:t>
+            </a:r>
+            <a:pPr algn="r" indent="0" marL="0">
+              <a:buNone/>
+            </a:pPr>
+            <a:r>
+              <a:rPr lang="en-US" sz="1200" b="1" dirty="0">
+                <a:solidFill>
+                  <a:srgbClr val="2E8B57"/>
+                </a:solidFill>
+                <a:latin typeface="Arial" pitchFamily="34" charset="0"/>
+                <a:ea typeface="Arial" pitchFamily="34" charset="-122"/>
+                <a:cs typeface="Arial" pitchFamily="34" charset="-120"/>
+              </a:rPr>
+              <a:t>■ Model  </a:t>
+            </a:r>
+            <a:pPr algn="r" indent="0" marL="0">
+              <a:buNone/>
+            </a:pPr>
+            <a:r>
+              <a:rPr lang="en-US" sz="1200" b="1" dirty="0">
+                <a:solidFill>
+                  <a:srgbClr val="D98E04"/>
+                </a:solidFill>
+                <a:latin typeface="Arial" pitchFamily="34" charset="0"/>
+                <a:ea typeface="Arial" pitchFamily="34" charset="-122"/>
+                <a:cs typeface="Arial" pitchFamily="34" charset="-120"/>
+              </a:rPr>
+              <a:t>■ View</a:t>
+            </a:r>
+            <a:endParaRPr lang="en-US" sz="1200" dirty="0"/>
+          </a:p>
+        </p:txBody>
+      </p:sp>
+      <p:sp>
+        <p:nvSpPr>
+          <p:cNvPr id="9" name="Shape 7"/>
           <p:cNvSpPr/>
           <p:nvPr/>
         </p:nvSpPr>
         <p:spPr>
           <a:xfrm>
-            <a:off x="4754880" y="1097280"/>
-            <a:ext cx="3931920" cy="3474720"/>
+            <a:off x="3611880" y="1188720"/>
+            <a:ext cx="5074920" cy="3749040"/>
           </a:xfrm>
           <a:prstGeom prst="roundRect">
             <a:avLst>
-              <a:gd name="adj" fmla="val 2105"/>
+              <a:gd name="adj" fmla="val 1951"/>
             </a:avLst>
           </a:prstGeom>
           <a:solidFill>
@@ -7557,14 +7702,14 @@
       </p:sp>
       <p:sp>
         <p:nvSpPr>
-          <p:cNvPr id="7" name="Text 5"/>
-          <p:cNvSpPr txBox="1"/>
-          <p:nvPr/>
-        </p:nvSpPr>
-        <p:spPr>
-          <a:xfrm>
-            <a:off x="4937760" y="1234440"/>
-            <a:ext cx="3566160" cy="2651760"/>
+          <p:cNvPr id="10" name="Text 8"/>
+          <p:cNvSpPr txBox="1"/>
+          <p:nvPr/>
+        </p:nvSpPr>
+        <p:spPr>
+          <a:xfrm>
+            <a:off x="3794760" y="1298448"/>
+            <a:ext cx="4754880" cy="3566160"/>
           </a:xfrm>
           <a:prstGeom prst="rect">
             <a:avLst/>
@@ -7580,7 +7725,7 @@
               <a:buNone/>
             </a:pPr>
             <a:r>
-              <a:rPr lang="en-US" sz="1200" dirty="0">
+              <a:rPr lang="en-US" sz="1000" dirty="0">
                 <a:solidFill>
                   <a:srgbClr val="8B93A5"/>
                 </a:solidFill>
@@ -7588,50 +7733,50 @@
                 <a:ea typeface="Courier New" pitchFamily="34" charset="-122"/>
                 <a:cs typeface="Courier New" pitchFamily="34" charset="-120"/>
               </a:rPr>
-              <a:t>// app-sem-mvc/server.js</a:t>
-            </a:r>
-            <a:endParaRPr lang="en-US" sz="1200" dirty="0"/>
-          </a:p>
-          <a:p>
-            <a:pPr indent="0" marL="0">
-              <a:buNone/>
-            </a:pPr>
-            <a:r>
-              <a:rPr lang="en-US" sz="1200" dirty="0">
-                <a:solidFill>
-                  <a:srgbClr val="F29A85"/>
+              <a:t>// app-sem-mvc/server.js (trechos)</a:t>
+            </a:r>
+            <a:endParaRPr lang="en-US" sz="1000" dirty="0"/>
+          </a:p>
+          <a:p>
+            <a:pPr indent="0" marL="0">
+              <a:buNone/>
+            </a:pPr>
+            <a:r>
+              <a:rPr lang="en-US" sz="1000" dirty="0">
+                <a:solidFill>
+                  <a:srgbClr val="6FD39A"/>
                 </a:solidFill>
                 <a:latin typeface="Courier New" pitchFamily="34" charset="0"/>
                 <a:ea typeface="Courier New" pitchFamily="34" charset="-122"/>
                 <a:cs typeface="Courier New" pitchFamily="34" charset="-120"/>
               </a:rPr>
-              <a:t>app.get("/", async (req, res) =&gt; {</a:t>
-            </a:r>
-            <a:endParaRPr lang="en-US" sz="1200" dirty="0"/>
-          </a:p>
-          <a:p>
-            <a:pPr indent="0" marL="0">
-              <a:buNone/>
-            </a:pPr>
-            <a:r>
-              <a:rPr lang="en-US" sz="1200" dirty="0">
-                <a:solidFill>
-                  <a:srgbClr val="6FD39A"/>
+              <a:t>const pool = new Pool({ host: process.env.DB_HOST, … });</a:t>
+            </a:r>
+            <a:endParaRPr lang="en-US" sz="1000" dirty="0"/>
+          </a:p>
+          <a:p>
+            <a:pPr indent="0" marL="0">
+              <a:buNone/>
+            </a:pPr>
+            <a:r>
+              <a:rPr lang="en-US" sz="1000" dirty="0">
+                <a:solidFill>
+                  <a:srgbClr val="F29A85"/>
                 </a:solidFill>
                 <a:latin typeface="Courier New" pitchFamily="34" charset="0"/>
                 <a:ea typeface="Courier New" pitchFamily="34" charset="-122"/>
                 <a:cs typeface="Courier New" pitchFamily="34" charset="-120"/>
               </a:rPr>
-              <a:t>  const r = await pool.query(</a:t>
-            </a:r>
-            <a:endParaRPr lang="en-US" sz="1200" dirty="0"/>
-          </a:p>
-          <a:p>
-            <a:pPr indent="0" marL="0">
-              <a:buNone/>
-            </a:pPr>
-            <a:r>
-              <a:rPr lang="en-US" sz="1200" dirty="0">
+              <a:t>app.get("/", async (requisicao, resposta) =&gt; {</a:t>
+            </a:r>
+            <a:endParaRPr lang="en-US" sz="1000" dirty="0"/>
+          </a:p>
+          <a:p>
+            <a:pPr indent="0" marL="0">
+              <a:buNone/>
+            </a:pPr>
+            <a:r>
+              <a:rPr lang="en-US" sz="1000" dirty="0">
                 <a:solidFill>
                   <a:srgbClr val="6FD39A"/>
                 </a:solidFill>
@@ -7639,16 +7784,16 @@
                 <a:ea typeface="Courier New" pitchFamily="34" charset="-122"/>
                 <a:cs typeface="Courier New" pitchFamily="34" charset="-120"/>
               </a:rPr>
-              <a:t>    "SELECT * FROM notas ORDER BY " +</a:t>
-            </a:r>
-            <a:endParaRPr lang="en-US" sz="1200" dirty="0"/>
-          </a:p>
-          <a:p>
-            <a:pPr indent="0" marL="0">
-              <a:buNone/>
-            </a:pPr>
-            <a:r>
-              <a:rPr lang="en-US" sz="1200" dirty="0">
+              <a:t>  const resultado = await pool.query(</a:t>
+            </a:r>
+            <a:endParaRPr lang="en-US" sz="1000" dirty="0"/>
+          </a:p>
+          <a:p>
+            <a:pPr indent="0" marL="0">
+              <a:buNone/>
+            </a:pPr>
+            <a:r>
+              <a:rPr lang="en-US" sz="1000" dirty="0">
                 <a:solidFill>
                   <a:srgbClr val="6FD39A"/>
                 </a:solidFill>
@@ -7656,33 +7801,33 @@
                 <a:ea typeface="Courier New" pitchFamily="34" charset="-122"/>
                 <a:cs typeface="Courier New" pitchFamily="34" charset="-120"/>
               </a:rPr>
-              <a:t>    "favorita DESC, criado_em DESC");</a:t>
-            </a:r>
-            <a:endParaRPr lang="en-US" sz="1200" dirty="0"/>
-          </a:p>
-          <a:p>
-            <a:pPr indent="0" marL="0">
-              <a:buNone/>
-            </a:pPr>
-            <a:r>
-              <a:rPr lang="en-US" sz="1200" dirty="0">
-                <a:solidFill>
-                  <a:srgbClr val="F2B84B"/>
+              <a:t>    "SELECT * FROM notas ORDER BY " +</a:t>
+            </a:r>
+            <a:endParaRPr lang="en-US" sz="1000" dirty="0"/>
+          </a:p>
+          <a:p>
+            <a:pPr indent="0" marL="0">
+              <a:buNone/>
+            </a:pPr>
+            <a:r>
+              <a:rPr lang="en-US" sz="1000" dirty="0">
+                <a:solidFill>
+                  <a:srgbClr val="6FD39A"/>
                 </a:solidFill>
                 <a:latin typeface="Courier New" pitchFamily="34" charset="0"/>
                 <a:ea typeface="Courier New" pitchFamily="34" charset="-122"/>
                 <a:cs typeface="Courier New" pitchFamily="34" charset="-120"/>
               </a:rPr>
-              <a:t>  const html = r.rows.map((n) =&gt;</a:t>
-            </a:r>
-            <a:endParaRPr lang="en-US" sz="1200" dirty="0"/>
-          </a:p>
-          <a:p>
-            <a:pPr indent="0" marL="0">
-              <a:buNone/>
-            </a:pPr>
-            <a:r>
-              <a:rPr lang="en-US" sz="1200" dirty="0">
+              <a:t>    "favorita DESC, criado_em DESC");</a:t>
+            </a:r>
+            <a:endParaRPr lang="en-US" sz="1000" dirty="0"/>
+          </a:p>
+          <a:p>
+            <a:pPr indent="0" marL="0">
+              <a:buNone/>
+            </a:pPr>
+            <a:r>
+              <a:rPr lang="en-US" sz="1000" dirty="0">
                 <a:solidFill>
                   <a:srgbClr val="F2B84B"/>
                 </a:solidFill>
@@ -7690,16 +7835,16 @@
                 <a:ea typeface="Courier New" pitchFamily="34" charset="-122"/>
                 <a:cs typeface="Courier New" pitchFamily="34" charset="-120"/>
               </a:rPr>
-              <a:t>    `&lt;li&gt;${n.titulo}&lt;/li&gt;`).join("");</a:t>
-            </a:r>
-            <a:endParaRPr lang="en-US" sz="1200" dirty="0"/>
-          </a:p>
-          <a:p>
-            <a:pPr indent="0" marL="0">
-              <a:buNone/>
-            </a:pPr>
-            <a:r>
-              <a:rPr lang="en-US" sz="1200" dirty="0">
+              <a:t>  const linhas = resultado.rows.map((nota) =&gt; `</a:t>
+            </a:r>
+            <a:endParaRPr lang="en-US" sz="1000" dirty="0"/>
+          </a:p>
+          <a:p>
+            <a:pPr indent="0" marL="0">
+              <a:buNone/>
+            </a:pPr>
+            <a:r>
+              <a:rPr lang="en-US" sz="1000" dirty="0">
                 <a:solidFill>
                   <a:srgbClr val="F2B84B"/>
                 </a:solidFill>
@@ -7707,93 +7852,247 @@
                 <a:ea typeface="Courier New" pitchFamily="34" charset="-122"/>
                 <a:cs typeface="Courier New" pitchFamily="34" charset="-120"/>
               </a:rPr>
-              <a:t>  res.send(`&lt;ul&gt;${html}&lt;/ul&gt;`);</a:t>
-            </a:r>
-            <a:endParaRPr lang="en-US" sz="1200" dirty="0"/>
-          </a:p>
-          <a:p>
-            <a:pPr indent="0" marL="0">
-              <a:buNone/>
-            </a:pPr>
-            <a:r>
-              <a:rPr lang="en-US" sz="1200" dirty="0">
-                <a:solidFill>
-                  <a:srgbClr val="E8E8E8"/>
+              <a:t>    &lt;li&gt;&lt;form action="/notas/${nota.id}/favorita"&gt;</a:t>
+            </a:r>
+            <a:endParaRPr lang="en-US" sz="1000" dirty="0"/>
+          </a:p>
+          <a:p>
+            <a:pPr indent="0" marL="0">
+              <a:buNone/>
+            </a:pPr>
+            <a:r>
+              <a:rPr lang="en-US" sz="1000" dirty="0">
+                <a:solidFill>
+                  <a:srgbClr val="F2B84B"/>
                 </a:solidFill>
                 <a:latin typeface="Courier New" pitchFamily="34" charset="0"/>
                 <a:ea typeface="Courier New" pitchFamily="34" charset="-122"/>
                 <a:cs typeface="Courier New" pitchFamily="34" charset="-120"/>
               </a:rPr>
+              <a:t>      &lt;strong&gt;${escapar(nota.titulo)}&lt;/strong&gt;</a:t>
+            </a:r>
+            <a:endParaRPr lang="en-US" sz="1000" dirty="0"/>
+          </a:p>
+          <a:p>
+            <a:pPr indent="0" marL="0">
+              <a:buNone/>
+            </a:pPr>
+            <a:r>
+              <a:rPr lang="en-US" sz="1000" dirty="0">
+                <a:solidFill>
+                  <a:srgbClr val="F2B84B"/>
+                </a:solidFill>
+                <a:latin typeface="Courier New" pitchFamily="34" charset="0"/>
+                <a:ea typeface="Courier New" pitchFamily="34" charset="-122"/>
+                <a:cs typeface="Courier New" pitchFamily="34" charset="-120"/>
+              </a:rPr>
+              <a:t>      &lt;form action="/notas/${nota.id}/excluir"&gt;</a:t>
+            </a:r>
+            <a:endParaRPr lang="en-US" sz="1000" dirty="0"/>
+          </a:p>
+          <a:p>
+            <a:pPr indent="0" marL="0">
+              <a:buNone/>
+            </a:pPr>
+            <a:r>
+              <a:rPr lang="en-US" sz="1000" dirty="0">
+                <a:solidFill>
+                  <a:srgbClr val="F2B84B"/>
+                </a:solidFill>
+                <a:latin typeface="Courier New" pitchFamily="34" charset="0"/>
+                <a:ea typeface="Courier New" pitchFamily="34" charset="-122"/>
+                <a:cs typeface="Courier New" pitchFamily="34" charset="-120"/>
+              </a:rPr>
+              <a:t>    &lt;/li&gt;`).join("");</a:t>
+            </a:r>
+            <a:endParaRPr lang="en-US" sz="1000" dirty="0"/>
+          </a:p>
+          <a:p>
+            <a:pPr indent="0" marL="0">
+              <a:buNone/>
+            </a:pPr>
+            <a:r>
+              <a:rPr lang="en-US" sz="1000" dirty="0">
+                <a:solidFill>
+                  <a:srgbClr val="F2B84B"/>
+                </a:solidFill>
+                <a:latin typeface="Courier New" pitchFamily="34" charset="0"/>
+                <a:ea typeface="Courier New" pitchFamily="34" charset="-122"/>
+                <a:cs typeface="Courier New" pitchFamily="34" charset="-120"/>
+              </a:rPr>
+              <a:t>  resposta.send(`&lt;html&gt;&lt;style&gt;body { … }&lt;/style&gt;</a:t>
+            </a:r>
+            <a:endParaRPr lang="en-US" sz="1000" dirty="0"/>
+          </a:p>
+          <a:p>
+            <a:pPr indent="0" marL="0">
+              <a:buNone/>
+            </a:pPr>
+            <a:r>
+              <a:rPr lang="en-US" sz="1000" dirty="0">
+                <a:solidFill>
+                  <a:srgbClr val="F2B84B"/>
+                </a:solidFill>
+                <a:latin typeface="Courier New" pitchFamily="34" charset="0"/>
+                <a:ea typeface="Courier New" pitchFamily="34" charset="-122"/>
+                <a:cs typeface="Courier New" pitchFamily="34" charset="-120"/>
+              </a:rPr>
+              <a:t>    &lt;form method="POST" action="/notas"&gt;…&lt;/form&gt;</a:t>
+            </a:r>
+            <a:endParaRPr lang="en-US" sz="1000" dirty="0"/>
+          </a:p>
+          <a:p>
+            <a:pPr indent="0" marL="0">
+              <a:buNone/>
+            </a:pPr>
+            <a:r>
+              <a:rPr lang="en-US" sz="1000" dirty="0">
+                <a:solidFill>
+                  <a:srgbClr val="F2B84B"/>
+                </a:solidFill>
+                <a:latin typeface="Courier New" pitchFamily="34" charset="0"/>
+                <a:ea typeface="Courier New" pitchFamily="34" charset="-122"/>
+                <a:cs typeface="Courier New" pitchFamily="34" charset="-120"/>
+              </a:rPr>
+              <a:t>    &lt;ul&gt;${linhas}&lt;/ul&gt;&lt;/html&gt;`);</a:t>
+            </a:r>
+            <a:endParaRPr lang="en-US" sz="1000" dirty="0"/>
+          </a:p>
+          <a:p>
+            <a:pPr indent="0" marL="0">
+              <a:buNone/>
+            </a:pPr>
+            <a:r>
+              <a:rPr lang="en-US" sz="1000" dirty="0">
+                <a:solidFill>
+                  <a:srgbClr val="F29A85"/>
+                </a:solidFill>
+                <a:latin typeface="Courier New" pitchFamily="34" charset="0"/>
+                <a:ea typeface="Courier New" pitchFamily="34" charset="-122"/>
+                <a:cs typeface="Courier New" pitchFamily="34" charset="-120"/>
+              </a:rPr>
               <a:t>});</a:t>
             </a:r>
-            <a:endParaRPr lang="en-US" sz="1200" dirty="0"/>
-          </a:p>
-        </p:txBody>
-      </p:sp>
-      <p:sp>
-        <p:nvSpPr>
-          <p:cNvPr id="8" name="Text 6"/>
-          <p:cNvSpPr txBox="1"/>
-          <p:nvPr/>
-        </p:nvSpPr>
-        <p:spPr>
-          <a:xfrm>
-            <a:off x="4937760" y="4023360"/>
-            <a:ext cx="3566160" cy="365760"/>
-          </a:xfrm>
-          <a:prstGeom prst="rect">
-            <a:avLst/>
-          </a:prstGeom>
-          <a:noFill/>
-          <a:ln/>
-        </p:spPr>
-        <p:txBody>
-          <a:bodyPr wrap="square" lIns="0" tIns="0" rIns="0" bIns="0" rtlCol="0" anchor="ctr"/>
-          <a:lstStyle/>
-          <a:p>
-            <a:pPr indent="0" marL="0">
-              <a:buNone/>
-            </a:pPr>
-            <a:r>
-              <a:rPr lang="en-US" sz="1300" b="1" dirty="0">
+            <a:endParaRPr lang="en-US" sz="1000" dirty="0"/>
+          </a:p>
+          <a:p>
+            <a:pPr indent="0" marL="0">
+              <a:buNone/>
+            </a:pPr>
+            <a:r>
+              <a:rPr lang="en-US" sz="1000" dirty="0">
                 <a:solidFill>
                   <a:srgbClr val="F29A85"/>
                 </a:solidFill>
-                <a:latin typeface="Arial" pitchFamily="34" charset="0"/>
-                <a:ea typeface="Arial" pitchFamily="34" charset="-122"/>
-                <a:cs typeface="Arial" pitchFamily="34" charset="-120"/>
-              </a:rPr>
-              <a:t>■ Controller  </a:t>
-            </a:r>
-            <a:pPr indent="0" marL="0">
-              <a:buNone/>
-            </a:pPr>
-            <a:r>
-              <a:rPr lang="en-US" sz="1300" b="1" dirty="0">
+                <a:latin typeface="Courier New" pitchFamily="34" charset="0"/>
+                <a:ea typeface="Courier New" pitchFamily="34" charset="-122"/>
+                <a:cs typeface="Courier New" pitchFamily="34" charset="-120"/>
+              </a:rPr>
+              <a:t>app.post("/notas", async (requisicao, resposta) =&gt; {</a:t>
+            </a:r>
+            <a:endParaRPr lang="en-US" sz="1000" dirty="0"/>
+          </a:p>
+          <a:p>
+            <a:pPr indent="0" marL="0">
+              <a:buNone/>
+            </a:pPr>
+            <a:r>
+              <a:rPr lang="en-US" sz="1000" dirty="0">
+                <a:solidFill>
+                  <a:srgbClr val="F29A85"/>
+                </a:solidFill>
+                <a:latin typeface="Courier New" pitchFamily="34" charset="0"/>
+                <a:ea typeface="Courier New" pitchFamily="34" charset="-122"/>
+                <a:cs typeface="Courier New" pitchFamily="34" charset="-120"/>
+              </a:rPr>
+              <a:t>  const { titulo, conteudo } = requisicao.body;</a:t>
+            </a:r>
+            <a:endParaRPr lang="en-US" sz="1000" dirty="0"/>
+          </a:p>
+          <a:p>
+            <a:pPr indent="0" marL="0">
+              <a:buNone/>
+            </a:pPr>
+            <a:r>
+              <a:rPr lang="en-US" sz="1000" dirty="0">
                 <a:solidFill>
                   <a:srgbClr val="6FD39A"/>
                 </a:solidFill>
-                <a:latin typeface="Arial" pitchFamily="34" charset="0"/>
-                <a:ea typeface="Arial" pitchFamily="34" charset="-122"/>
-                <a:cs typeface="Arial" pitchFamily="34" charset="-120"/>
-              </a:rPr>
-              <a:t>■ Model  </a:t>
-            </a:r>
-            <a:pPr indent="0" marL="0">
-              <a:buNone/>
-            </a:pPr>
-            <a:r>
-              <a:rPr lang="en-US" sz="1300" b="1" dirty="0">
-                <a:solidFill>
-                  <a:srgbClr val="F2B84B"/>
-                </a:solidFill>
-                <a:latin typeface="Arial" pitchFamily="34" charset="0"/>
-                <a:ea typeface="Arial" pitchFamily="34" charset="-122"/>
-                <a:cs typeface="Arial" pitchFamily="34" charset="-120"/>
-              </a:rPr>
-              <a:t>■ View</a:t>
-            </a:r>
-            <a:endParaRPr lang="en-US" sz="1300" dirty="0"/>
+                <a:latin typeface="Courier New" pitchFamily="34" charset="0"/>
+                <a:ea typeface="Courier New" pitchFamily="34" charset="-122"/>
+                <a:cs typeface="Courier New" pitchFamily="34" charset="-120"/>
+              </a:rPr>
+              <a:t>  if (!titulo) return resposta.redirect("/?erro=…");</a:t>
+            </a:r>
+            <a:endParaRPr lang="en-US" sz="1000" dirty="0"/>
+          </a:p>
+          <a:p>
+            <a:pPr indent="0" marL="0">
+              <a:buNone/>
+            </a:pPr>
+            <a:r>
+              <a:rPr lang="en-US" sz="1000" dirty="0">
+                <a:solidFill>
+                  <a:srgbClr val="6FD39A"/>
+                </a:solidFill>
+                <a:latin typeface="Courier New" pitchFamily="34" charset="0"/>
+                <a:ea typeface="Courier New" pitchFamily="34" charset="-122"/>
+                <a:cs typeface="Courier New" pitchFamily="34" charset="-120"/>
+              </a:rPr>
+              <a:t>  await pool.query("INSERT INTO notas …", [titulo]);</a:t>
+            </a:r>
+            <a:endParaRPr lang="en-US" sz="1000" dirty="0"/>
+          </a:p>
+          <a:p>
+            <a:pPr indent="0" marL="0">
+              <a:buNone/>
+            </a:pPr>
+            <a:r>
+              <a:rPr lang="en-US" sz="1000" dirty="0">
+                <a:solidFill>
+                  <a:srgbClr val="F29A85"/>
+                </a:solidFill>
+                <a:latin typeface="Courier New" pitchFamily="34" charset="0"/>
+                <a:ea typeface="Courier New" pitchFamily="34" charset="-122"/>
+                <a:cs typeface="Courier New" pitchFamily="34" charset="-120"/>
+              </a:rPr>
+              <a:t>  resposta.redirect("/");</a:t>
+            </a:r>
+            <a:endParaRPr lang="en-US" sz="1000" dirty="0"/>
+          </a:p>
+          <a:p>
+            <a:pPr indent="0" marL="0">
+              <a:buNone/>
+            </a:pPr>
+            <a:r>
+              <a:rPr lang="en-US" sz="1000" dirty="0">
+                <a:solidFill>
+                  <a:srgbClr val="F29A85"/>
+                </a:solidFill>
+                <a:latin typeface="Courier New" pitchFamily="34" charset="0"/>
+                <a:ea typeface="Courier New" pitchFamily="34" charset="-122"/>
+                <a:cs typeface="Courier New" pitchFamily="34" charset="-120"/>
+              </a:rPr>
+              <a:t>});</a:t>
+            </a:r>
+            <a:endParaRPr lang="en-US" sz="1000" dirty="0"/>
+          </a:p>
+          <a:p>
+            <a:pPr indent="0" marL="0">
+              <a:buNone/>
+            </a:pPr>
+            <a:r>
+              <a:rPr lang="en-US" sz="1000" dirty="0">
+                <a:solidFill>
+                  <a:srgbClr val="8B93A5"/>
+                </a:solidFill>
+                <a:latin typeface="Courier New" pitchFamily="34" charset="0"/>
+                <a:ea typeface="Courier New" pitchFamily="34" charset="-122"/>
+                <a:cs typeface="Courier New" pitchFamily="34" charset="-120"/>
+              </a:rPr>
+              <a:t>// … + rotas de excluir e favoritar, tudo igual</a:t>
+            </a:r>
+            <a:endParaRPr lang="en-US" sz="1000" dirty="0"/>
           </a:p>
         </p:txBody>
       </p:sp>

--- a/docs/aula-mvc.pptx
+++ b/docs/aula-mvc.pptx
@@ -1225,7 +1225,7 @@
           <a:p>
             <a:r>
               <a:rPr lang="en-US" dirty="0"/>
-              <a:t>Funcionou! E respondendo: a regra de negócio entraria no Model. A mudança fica isolada — esse é o ganho do MVC.</a:t>
+              <a:t>Funcionou! Agora, uma pergunta para vocês: a regra 'as favoritas aparecem primeiro' — ela está na View ou no Model? Parece coisa da tela, porque é a tela que mostra a ordem. Mas é regra de negócio, então está no Model: é o ORDER BY favorita DESC no Nota.js. (Abrir o Nota.js e mostrar a linha com o comentário 'Regra de negócio'.) A View só exibe na ordem que recebe. Se amanhã a regra mudar, mexemos só no Model — esse é o ganho do MVC.</a:t>
             </a:r>
             <a:endParaRPr lang="en-US" dirty="0"/>
           </a:p>
@@ -7064,7 +7064,7 @@
                 <a:ea typeface="Arial" pitchFamily="34" charset="-122"/>
                 <a:cs typeface="Arial" pitchFamily="34" charset="-120"/>
               </a:rPr>
-              <a:t>e se a regra fosse "só excluir notas com mais de 1 dia"? Em qual camada?</a:t>
+              <a:t>a regra "as favoritas aparecem primeiro" está na View ou no Model?</a:t>
             </a:r>
             <a:endParaRPr lang="en-US" sz="1700" dirty="0"/>
           </a:p>
